--- a/docs/Battlefield_Radio_Intelligibility_Engine_Pitch_Deck.pptx
+++ b/docs/Battlefield_Radio_Intelligibility_Engine_Pitch_Deck.pptx
@@ -3167,7 +3167,7 @@
             </a:r>
             <a:br/>
             <a:r>
-              <a:t>• Mathematical Safety: Deterministic Reliability Guardrail (Zero Catastrophic WER Failure)</a:t>
+              <a:t>• Dual Tactical Modes: Intelligibility Mode (0.409 WER) vs. Quality Mode (2.398 PESQ)</a:t>
             </a:r>
             <a:br/>
             <a:r>
@@ -4562,7 +4562,7 @@
               </a:defRPr>
             </a:pPr>
             <a:r>
-              <a:t>  Branch A Causal ConvGRU + Default Guard. Baseline deployed on Snapdragon NPU achieving 411 µs latency.</a:t>
+              <a:t>  Branch A Causal ConvGRU + Default Guard. Baseline deployed on Snapdragon NPU achieving 411 µs latency (PESQ: 1.232, STOI: 0.758).</a:t>
             </a:r>
           </a:p>
           <a:p>
@@ -4575,7 +4575,7 @@
               </a:defRPr>
             </a:pPr>
             <a:r>
-              <a:t>• Step 2: Reliability Guard Hyperparameter Tuning (Phase 8A)</a:t>
+              <a:t>• Step 2: Reliability Guard Hyperparameter Tuning (Phase 8A — ASR Mode)</a:t>
             </a:r>
           </a:p>
           <a:p>
@@ -4591,7 +4591,7 @@
               </a:defRPr>
             </a:pPr>
             <a:r>
-              <a:t>  Systematic grid search on validation set (energy ratios, spectral flatness, envelope correlation). Guarantees zero WER regression at low SNR.</a:t>
+              <a:t>  Systematic grid search on validation set (energy ratios, spectral flatness, envelope correlation). Yields optimal Whisper WER of 0.409 (median: 0.353 vs 0.364 baseline).</a:t>
             </a:r>
           </a:p>
           <a:p>
@@ -4604,7 +4604,7 @@
               </a:defRPr>
             </a:pPr>
             <a:r>
-              <a:t>• Step 3: Host-Side DSP Spectral Post-Filter (Phase 8B)</a:t>
+              <a:t>• Step 3: Host-Side DSP Spectral Post-Filter (Phase 8B — Quality Mode)</a:t>
             </a:r>
           </a:p>
           <a:p>
@@ -4620,7 +4620,7 @@
               </a:defRPr>
             </a:pPr>
             <a:r>
-              <a:t>  Classical Wiener post-filter applied after iSTFT synthesis. Removes residual high-frequency radio hiss and boosts PESQ/STOI.</a:t>
+              <a:t>  Classical Wiener post-filter applied after iSTFT synthesis. Squelches stationary radio hiss, boosting test PESQ from 1.879 to 2.398 (+0.519 delta; Val: 2.413) with STOI 0.944.</a:t>
             </a:r>
           </a:p>
           <a:p>
@@ -4649,7 +4649,7 @@
               </a:defRPr>
             </a:pPr>
             <a:r>
-              <a:t>  ONNX Runtime dynamic quantization generated INT8 model (artifacts/branch_a_denoiser_int8.onnx) for low memory bandwidth edge devices.</a:t>
+              <a:t>  ONNX Runtime dynamic quantization generated INT8 model (artifacts/branch_a_denoiser_int8.onnx, 6.51 MB) for memory-constrained edge SDR.</a:t>
             </a:r>
           </a:p>
         </p:txBody>
@@ -4763,7 +4763,7 @@
               </a:defRPr>
             </a:pPr>
             <a:r>
-              <a:t>Why Intelligibility (WER) is the Tactical Metric That Matters:</a:t>
+              <a:t>Tactical Mission Flexibility: Quality Mode vs. Intelligibility Mode</a:t>
             </a:r>
           </a:p>
           <a:p>
@@ -4779,7 +4779,7 @@
               </a:defRPr>
             </a:pPr>
             <a:r>
-              <a:t>In military communications, human operators and automated command-and-control systems require correct word recognition (callsigns, coordinates, fire missions), not cosmetic hi-fi acoustics.</a:t>
+              <a:t>In military communications, automated ASR command-and-control requires preserving consonant transients, while human operators in noisy armored cockpits require background hiss squelch.</a:t>
             </a:r>
           </a:p>
           <a:p>
@@ -4795,23 +4795,7 @@
               </a:defRPr>
             </a:pPr>
             <a:r>
-              <a:t>Key Comparative Insights:</a:t>
-            </a:r>
-          </a:p>
-          <a:p>
-            <a:pPr>
-              <a:spcAft>
-                <a:spcPts val="600"/>
-              </a:spcAft>
-              <a:defRPr sz="1500" b="1">
-                <a:solidFill>
-                  <a:srgbClr val="F3F4F6"/>
-                </a:solidFill>
-                <a:latin typeface="Arial"/>
-              </a:defRPr>
-            </a:pPr>
-            <a:r>
-              <a:t>1. Best Tactical WER: Branch A + Guard achieves superior word error rate compared to all tested systems.</a:t>
+              <a:t>Key Comparative Insights &amp; Canonical Test Set Results:</a:t>
             </a:r>
           </a:p>
           <a:p>
@@ -4827,7 +4811,7 @@
               </a:defRPr>
             </a:pPr>
             <a:r>
-              <a:t>2. 100% NPU Deployable: DeepFilterNet3 cannot be compiled to edge NPU due to complex-valued STFT ops and heavy dual-path transformers.</a:t>
+              <a:t>1. Intelligibility Mode (Branch A + Guard): Minimizes Word Error Rate (0.409 mean / 0.353 median WER vs 0.443 / 0.364 raw degraded) for automated Whisper ingestion.</a:t>
             </a:r>
           </a:p>
           <a:p>
@@ -4843,7 +4827,7 @@
               </a:defRPr>
             </a:pPr>
             <a:r>
-              <a:t>3. 77× Real-Time Throughput: 411 µs latency per 32 ms chunk leaves 98.7% of NPU time free for on-device ASR and encryption.</a:t>
+              <a:t>2. Quality Mode (+ Spectral Post-Filter): Squelches residual static for human ears, achieving a massive +0.52 PESQ jump (1.879 -&gt; 2.398, STOI: 0.944). Toggleable in real time.</a:t>
             </a:r>
           </a:p>
           <a:p>
@@ -4859,7 +4843,23 @@
               </a:defRPr>
             </a:pPr>
             <a:r>
-              <a:t>4. Reliability Guarantee: The engine's soft-blend guardrail mathematically prevents catastrophic speech suppression.</a:t>
+              <a:t>3. 100% NPU Residency: 240/240 ops on Hexagon NPU (0 CPU fallback). DeepFilterNet3 cannot be compiled due to complex STFT ops.</a:t>
+            </a:r>
+          </a:p>
+          <a:p>
+            <a:pPr>
+              <a:spcAft>
+                <a:spcPts val="600"/>
+              </a:spcAft>
+              <a:defRPr sz="1300" b="0">
+                <a:solidFill>
+                  <a:srgbClr val="F3F4F6"/>
+                </a:solidFill>
+                <a:latin typeface="Arial"/>
+              </a:defRPr>
+            </a:pPr>
+            <a:r>
+              <a:t>4. 77× Real-Time Throughput: 411 µs latency per 32 ms chunk leaves 98.7% of NPU compute budget free for concurrent ASR &amp; crypto.</a:t>
             </a:r>
           </a:p>
         </p:txBody>
